--- a/Canvia/Tests/Fixtures/deck.pptx
+++ b/Canvia/Tests/Fixtures/deck.pptx
@@ -8,6 +8,7 @@
     <p:sldId id="256" r:id="rId3"/>
     <p:sldId id="257" r:id="rId2"/>
     <p:sldId id="258" r:id="rId4"/>
+    <p:sldId id="259" r:id="rId6"/>
   </p:sldIdLst>
   <p:sldSz cx="12192000" cy="6858000"/>
   <p:notesSz cx="6858000" cy="9144000"/>
@@ -112,6 +113,96 @@
           <a:lstStyle/>
           <a:p>
             <a:endParaRPr lang="en-GB"/>
+          </a:p>
+        </p:txBody>
+      </p:sp>
+    </p:spTree>
+  </p:cSld>
+  <p:clrMapOvr>
+    <a:masterClrMapping/>
+  </p:clrMapOvr>
+</p:sldLayout>
+</file>
+
+<file path=ppt/slideLayouts/slideLayout2.xml><?xml version="1.0" encoding="utf-8"?>
+<p:sldLayout xmlns:a="http://schemas.openxmlformats.org/drawingml/2006/main" xmlns:r="http://schemas.openxmlformats.org/officeDocument/2006/relationships" xmlns:p="http://schemas.openxmlformats.org/presentationml/2006/main" type="title" preserve="1">
+  <p:cSld name="Title Slide">
+    <p:spTree>
+      <p:nvGrpSpPr>
+        <p:cNvPr id="1" name=""/>
+        <p:cNvGrpSpPr/>
+        <p:nvPr/>
+      </p:nvGrpSpPr>
+      <p:grpSpPr/>
+      <p:sp>
+        <p:nvSpPr>
+          <p:cNvPr id="2" name="Title 1"/>
+          <p:cNvSpPr/>
+          <p:nvPr>
+            <p:ph type="ctrTitle"/>
+          </p:nvPr>
+        </p:nvSpPr>
+        <p:spPr>
+          <a:xfrm>
+            <a:off x="1524000" y="1122363"/>
+            <a:ext cx="9144000" cy="2387600"/>
+          </a:xfrm>
+        </p:spPr>
+        <p:txBody>
+          <a:bodyPr anchor="b"/>
+          <a:lstStyle>
+            <a:lvl1pPr algn="ctr">
+              <a:defRPr sz="6000"/>
+            </a:lvl1pPr>
+          </a:lstStyle>
+          <a:p>
+            <a:endParaRPr lang="en-GB"/>
+          </a:p>
+        </p:txBody>
+      </p:sp>
+      <p:sp>
+        <p:nvSpPr>
+          <p:cNvPr id="3" name="Subtitle 2"/>
+          <p:cNvSpPr/>
+          <p:nvPr>
+            <p:ph type="subTitle" idx="1"/>
+          </p:nvPr>
+        </p:nvSpPr>
+        <p:spPr>
+          <a:xfrm>
+            <a:off x="1524000" y="3602038"/>
+            <a:ext cx="9144000" cy="1655762"/>
+          </a:xfrm>
+        </p:spPr>
+        <p:txBody>
+          <a:bodyPr/>
+          <a:lstStyle>
+            <a:lvl1pPr marL="0" indent="0" algn="ctr">
+              <a:defRPr sz="2400"/>
+            </a:lvl1pPr>
+          </a:lstStyle>
+          <a:p>
+            <a:endParaRPr lang="en-GB"/>
+          </a:p>
+        </p:txBody>
+      </p:sp>
+      <p:sp>
+        <p:nvSpPr>
+          <p:cNvPr id="4" name="Slide Number Placeholder 3"/>
+          <p:cNvSpPr/>
+          <p:nvPr>
+            <p:ph type="sldNum" sz="quarter" idx="12"/>
+          </p:nvPr>
+        </p:nvSpPr>
+        <p:spPr/>
+        <p:txBody>
+          <a:bodyPr/>
+          <a:lstStyle/>
+          <a:p>
+            <a:fld id="{B6F15528-21DE-4FAA-801E-634DDDAF4B2B}" type="slidenum">
+              <a:rPr lang="en-GB"/>
+              <a:t>&lt;#&gt;</a:t>
+            </a:fld>
           </a:p>
         </p:txBody>
       </p:sp>
@@ -194,11 +285,48 @@
           </a:p>
         </p:txBody>
       </p:sp>
+      <p:sp>
+        <p:nvSpPr>
+          <p:cNvPr id="4" name="Slide Number Placeholder 3"/>
+          <p:cNvSpPr/>
+          <p:nvPr>
+            <p:ph type="sldNum" sz="quarter" idx="4"/>
+          </p:nvPr>
+        </p:nvSpPr>
+        <p:spPr>
+          <a:xfrm>
+            <a:off x="8610600" y="6356350"/>
+            <a:ext cx="2743200" cy="365125"/>
+          </a:xfrm>
+          <a:prstGeom prst="rect">
+            <a:avLst/>
+          </a:prstGeom>
+        </p:spPr>
+        <p:txBody>
+          <a:bodyPr anchor="ctr"/>
+          <a:lstStyle>
+            <a:lvl1pPr algn="r">
+              <a:defRPr sz="1200">
+                <a:solidFill>
+                  <a:srgbClr val="898989"/>
+                </a:solidFill>
+              </a:defRPr>
+            </a:lvl1pPr>
+          </a:lstStyle>
+          <a:p>
+            <a:fld id="{B6F15528-21DE-4FAA-801E-634DDDAF4B2B}" type="slidenum">
+              <a:rPr lang="en-GB"/>
+              <a:t>&lt;#&gt;</a:t>
+            </a:fld>
+          </a:p>
+        </p:txBody>
+      </p:sp>
     </p:spTree>
   </p:cSld>
   <p:clrMap bg1="lt1" tx1="dk1" bg2="lt2" tx2="dk2" accent1="accent1" accent2="accent2" accent3="accent3" accent4="accent4" accent5="accent5" accent6="accent6" hlink="hlink" folHlink="folHlink"/>
   <p:sldLayoutIdLst>
     <p:sldLayoutId id="2147483649" r:id="rId1"/>
+    <p:sldLayoutId id="2147483650" r:id="rId3"/>
   </p:sldLayoutIdLst>
   <p:txStyles>
     <p:titleStyle>
@@ -921,6 +1049,81 @@
 </p:sld>
 </file>
 
+<file path=ppt/slides/slide4.xml><?xml version="1.0" encoding="utf-8"?>
+<p:sld xmlns:a="http://schemas.openxmlformats.org/drawingml/2006/main" xmlns:r="http://schemas.openxmlformats.org/officeDocument/2006/relationships" xmlns:p="http://schemas.openxmlformats.org/presentationml/2006/main">
+  <p:cSld>
+    <p:spTree>
+      <p:nvGrpSpPr>
+        <p:cNvPr id="1" name=""/>
+        <p:cNvGrpSpPr/>
+        <p:nvPr/>
+      </p:nvGrpSpPr>
+      <p:grpSpPr/>
+      <p:sp>
+        <p:nvSpPr>
+          <p:cNvPr id="2" name="Title 1"/>
+          <p:cNvSpPr/>
+          <p:nvPr>
+            <p:ph type="ctrTitle"/>
+          </p:nvPr>
+        </p:nvSpPr>
+        <p:spPr/>
+        <p:txBody>
+          <a:bodyPr/>
+          <a:lstStyle/>
+          <a:p>
+            <a:r>
+              <a:rPr lang="en-GB"/>
+              <a:t>Launch day</a:t>
+            </a:r>
+          </a:p>
+        </p:txBody>
+      </p:sp>
+      <p:sp>
+        <p:nvSpPr>
+          <p:cNvPr id="3" name="Subtitle 2"/>
+          <p:cNvSpPr/>
+          <p:nvPr>
+            <p:ph type="subTitle" idx="1"/>
+          </p:nvPr>
+        </p:nvSpPr>
+        <p:spPr/>
+        <p:txBody>
+          <a:bodyPr/>
+          <a:lstStyle/>
+          <a:p>
+            <a:r>
+              <a:rPr lang="en-GB"/>
+              <a:t>Doors open at ten</a:t>
+            </a:r>
+          </a:p>
+        </p:txBody>
+      </p:sp>
+      <p:sp>
+        <p:nvSpPr>
+          <p:cNvPr id="4" name="Slide Number Placeholder 3"/>
+          <p:cNvSpPr/>
+          <p:nvPr>
+            <p:ph type="sldNum" sz="quarter" idx="12"/>
+          </p:nvPr>
+        </p:nvSpPr>
+        <p:spPr/>
+        <p:txBody>
+          <a:bodyPr/>
+          <a:lstStyle/>
+          <a:p>
+            <a:fld id="{B6F15528-21DE-4FAA-801E-634DDDAF4B2B}" type="slidenum">
+              <a:rPr lang="en-GB"/>
+              <a:t>4</a:t>
+            </a:fld>
+          </a:p>
+        </p:txBody>
+      </p:sp>
+    </p:spTree>
+  </p:cSld>
+</p:sld>
+</file>
+
 <file path=ppt/theme/theme1.xml><?xml version="1.0" encoding="utf-8"?>
 <a:theme xmlns:a="http://schemas.openxmlformats.org/drawingml/2006/main" name="Office">
   <a:themeElements>

--- a/Canvia/Tests/Fixtures/deck.pptx
+++ b/Canvia/Tests/Fixtures/deck.pptx
@@ -9,6 +9,7 @@
     <p:sldId id="257" r:id="rId2"/>
     <p:sldId id="258" r:id="rId4"/>
     <p:sldId id="259" r:id="rId6"/>
+    <p:sldId id="260" r:id="rId7"/>
   </p:sldIdLst>
   <p:sldSz cx="12192000" cy="6858000"/>
   <p:notesSz cx="6858000" cy="9144000"/>
@@ -1124,6 +1125,231 @@
 </p:sld>
 </file>
 
+<file path=ppt/slides/slide5.xml><?xml version="1.0" encoding="utf-8"?>
+<p:sld xmlns:a="http://schemas.openxmlformats.org/drawingml/2006/main" xmlns:r="http://schemas.openxmlformats.org/officeDocument/2006/relationships" xmlns:p="http://schemas.openxmlformats.org/presentationml/2006/main">
+  <p:cSld>
+    <p:spTree>
+      <p:nvGrpSpPr>
+        <p:cNvPr id="1" name=""/>
+        <p:cNvGrpSpPr/>
+        <p:nvPr/>
+      </p:nvGrpSpPr>
+      <p:grpSpPr/>
+      <p:sp>
+        <p:nvSpPr>
+          <p:cNvPr id="2" name="TextBox 1"/>
+          <p:cNvSpPr txBox="1"/>
+          <p:nvPr/>
+        </p:nvSpPr>
+        <p:spPr>
+          <a:xfrm>
+            <a:off x="952500" y="952500"/>
+            <a:ext cx="4762500" cy="2857500"/>
+          </a:xfrm>
+          <a:prstGeom prst="rect">
+            <a:avLst/>
+          </a:prstGeom>
+          <a:noFill/>
+        </p:spPr>
+        <p:txBody>
+          <a:bodyPr lIns="0" tIns="0" rIns="0" bIns="0"/>
+          <a:lstStyle>
+            <a:lvl2pPr marL="742950" indent="-285750">
+              <a:buFont typeface="Arial"/>
+              <a:buChar char="–"/>
+            </a:lvl2pPr>
+            <a:lvl3pPr marL="1143000" indent="-228600">
+              <a:buFont typeface="Arial"/>
+              <a:buChar char="▪"/>
+            </a:lvl3pPr>
+          </a:lstStyle>
+          <a:p>
+            <a:pPr marL="342900" indent="-342900">
+              <a:buFont typeface="Arial"/>
+              <a:buChar char="•"/>
+            </a:pPr>
+            <a:r>
+              <a:rPr lang="en-GB" sz="2400">
+                <a:latin typeface="Lora"/>
+              </a:rPr>
+              <a:t>Plan</a:t>
+            </a:r>
+          </a:p>
+          <a:p>
+            <a:pPr lvl="1"/>
+            <a:r>
+              <a:rPr lang="en-GB" sz="2400">
+                <a:latin typeface="Lora"/>
+              </a:rPr>
+              <a:t>Draft</a:t>
+            </a:r>
+          </a:p>
+          <a:p>
+            <a:pPr lvl="2"/>
+            <a:r>
+              <a:rPr lang="en-GB" sz="2400">
+                <a:latin typeface="Lora"/>
+              </a:rPr>
+              <a:t>Review</a:t>
+            </a:r>
+          </a:p>
+          <a:p>
+            <a:pPr marL="342900" indent="-342900">
+              <a:buAutoNum type="arabicPeriod" startAt="4"/>
+            </a:pPr>
+            <a:r>
+              <a:rPr lang="en-GB" sz="2400">
+                <a:latin typeface="Lora"/>
+              </a:rPr>
+              <a:t>Fourth</a:t>
+            </a:r>
+          </a:p>
+          <a:p>
+            <a:pPr marL="342900" indent="-342900">
+              <a:buAutoNum type="arabicPeriod" startAt="4"/>
+            </a:pPr>
+            <a:r>
+              <a:rPr lang="en-GB" sz="2400">
+                <a:latin typeface="Lora"/>
+              </a:rPr>
+              <a:t>Fifth</a:t>
+            </a:r>
+          </a:p>
+          <a:p>
+            <a:pPr>
+              <a:buNone/>
+            </a:pPr>
+            <a:r>
+              <a:rPr lang="en-GB" sz="2400">
+                <a:latin typeface="Lora"/>
+              </a:rPr>
+              <a:t>Done</a:t>
+            </a:r>
+          </a:p>
+        </p:txBody>
+      </p:sp>
+      <p:sp>
+        <p:nvSpPr>
+          <p:cNvPr id="3" name="TextBox 2"/>
+          <p:cNvSpPr txBox="1"/>
+          <p:nvPr/>
+        </p:nvSpPr>
+        <p:spPr>
+          <a:xfrm>
+            <a:off x="6096000" y="952500"/>
+            <a:ext cx="4762500" cy="1905000"/>
+          </a:xfrm>
+          <a:prstGeom prst="rect">
+            <a:avLst/>
+          </a:prstGeom>
+          <a:noFill/>
+        </p:spPr>
+        <p:txBody>
+          <a:bodyPr lIns="0" tIns="0" rIns="0" bIns="0"/>
+          <a:lstStyle/>
+          <a:p>
+            <a:pPr algn="l">
+              <a:lnSpc>
+                <a:spcPct val="150000"/>
+              </a:lnSpc>
+              <a:spcAft>
+                <a:spcPts val="1200"/>
+              </a:spcAft>
+            </a:pPr>
+            <a:r>
+              <a:rPr lang="en-GB" sz="2400" spc="300">
+                <a:latin typeface="Lora"/>
+              </a:rPr>
+              <a:t>Read the </a:t>
+            </a:r>
+            <a:r>
+              <a:rPr lang="en-GB" sz="2400" spc="300" strike="sngStrike">
+                <a:latin typeface="Lora"/>
+              </a:rPr>
+              <a:t>old</a:t>
+            </a:r>
+            <a:r>
+              <a:rPr lang="en-GB" sz="2400" spc="300">
+                <a:latin typeface="Lora"/>
+              </a:rPr>
+              <a:t> news first</a:t>
+            </a:r>
+          </a:p>
+          <a:p>
+            <a:pPr algn="l">
+              <a:lnSpc>
+                <a:spcPct val="150000"/>
+              </a:lnSpc>
+              <a:spcAft>
+                <a:spcPts val="1200"/>
+              </a:spcAft>
+            </a:pPr>
+            <a:r>
+              <a:rPr lang="en-GB" sz="2400" spc="300">
+                <a:latin typeface="Lora"/>
+              </a:rPr>
+              <a:t>Visit </a:t>
+            </a:r>
+            <a:r>
+              <a:rPr lang="en-GB" sz="2400" spc="300">
+                <a:latin typeface="Lora"/>
+                <a:hlinkClick r:id="rId2"/>
+              </a:rPr>
+              <a:t>our site</a:t>
+            </a:r>
+            <a:r>
+              <a:rPr lang="en-GB" sz="2400" spc="300">
+                <a:latin typeface="Lora"/>
+              </a:rPr>
+              <a:t> or </a:t>
+            </a:r>
+            <a:r>
+              <a:rPr lang="en-GB" sz="2400" spc="300">
+                <a:latin typeface="Lora"/>
+                <a:hlinkClick r:id="rId3" action="ppaction://hlinksldjump"/>
+              </a:rPr>
+              <a:t>slide one</a:t>
+            </a:r>
+          </a:p>
+        </p:txBody>
+      </p:sp>
+      <p:sp>
+        <p:nvSpPr>
+          <p:cNvPr id="4" name="TextBox 3"/>
+          <p:cNvSpPr txBox="1"/>
+          <p:nvPr/>
+        </p:nvSpPr>
+        <p:spPr>
+          <a:xfrm>
+            <a:off x="6096000" y="3810000"/>
+            <a:ext cx="4762500" cy="952500"/>
+          </a:xfrm>
+          <a:prstGeom prst="rect">
+            <a:avLst/>
+          </a:prstGeom>
+          <a:noFill/>
+        </p:spPr>
+        <p:txBody>
+          <a:bodyPr lIns="0" tIns="0" rIns="0" bIns="0">
+            <a:normAutofit fontScale="62500" lnSpcReduction="20000"/>
+          </a:bodyPr>
+          <a:lstStyle/>
+          <a:p>
+            <a:pPr algn="l"/>
+            <a:r>
+              <a:rPr lang="en-GB" sz="4800">
+                <a:latin typeface="Lora"/>
+              </a:rPr>
+              <a:t>Shrunk to fit</a:t>
+            </a:r>
+          </a:p>
+        </p:txBody>
+      </p:sp>
+    </p:spTree>
+  </p:cSld>
+</p:sld>
+</file>
+
 <file path=ppt/theme/theme1.xml><?xml version="1.0" encoding="utf-8"?>
 <a:theme xmlns:a="http://schemas.openxmlformats.org/drawingml/2006/main" name="Office">
   <a:themeElements>
